--- a/assets/pptx/catalog-534.pptx
+++ b/assets/pptx/catalog-534.pptx
@@ -3531,7 +3531,7 @@
                 <a:ea typeface="Ebrima"/>
                 <a:cs typeface="Ebrima"/>
               </a:rPr>
-              <a:t>ሠማይና ምድርን የሞላህ (2x)</a:t>
+              <a:t>ሠማይና ምድርን የሞላህ 2x</a:t>
             </a:r>
           </a:p>
         </p:txBody>
@@ -3616,7 +3616,7 @@
                 <a:ea typeface="Ebrima"/>
                 <a:cs typeface="Ebrima"/>
               </a:rPr>
-              <a:t>ስለ አንተ ግን የምለው ፈጽሞ አላጣሁኝም (2x)</a:t>
+              <a:t>ስለ አንተ ግን የምለው ፈጽሞ አላጣሁኝም 2x</a:t>
             </a:r>
           </a:p>
         </p:txBody>
@@ -3822,7 +3822,7 @@
                 <a:ea typeface="Ebrima"/>
                 <a:cs typeface="Ebrima"/>
               </a:rPr>
-              <a:t>ክብር እሰጥሃለው አምላኬ ክብር እሰጥሃለው (2x)</a:t>
+              <a:t>ክብር እሰጥሃለው አምላኬ ክብር እሰጥሃለው 2x</a:t>
             </a:r>
           </a:p>
           <a:p>
@@ -3979,7 +3979,7 @@
                 <a:ea typeface="Ebrima"/>
                 <a:cs typeface="Ebrima"/>
               </a:rPr>
-              <a:t>ክብር እሰጥሃለው አምላኬ ክብር እሰጥሃለው (2x)</a:t>
+              <a:t>ክብር እሰጥሃለው አምላኬ ክብር እሰጥሃለው 2x</a:t>
             </a:r>
           </a:p>
         </p:txBody>
@@ -4185,7 +4185,7 @@
                 <a:ea typeface="Ebrima"/>
                 <a:cs typeface="Ebrima"/>
               </a:rPr>
-              <a:t>ክብር እሰጥሃለው አምላኬ ክብር እሰጥሃለው (2x)</a:t>
+              <a:t>ክብር እሰጥሃለው አምላኬ ክብር እሰጥሃለው 2x</a:t>
             </a:r>
           </a:p>
         </p:txBody>
@@ -4288,7 +4288,7 @@
                 <a:ea typeface="Ebrima"/>
                 <a:cs typeface="Ebrima"/>
               </a:rPr>
-              <a:t>ይገባዋል እግዚአብሔር ሆሆ (2x)</a:t>
+              <a:t>ይገባዋል እግዚአብሔር ሆሆ 2x</a:t>
             </a:r>
           </a:p>
         </p:txBody>
